--- a/presentation/Convenience_Absenteeism_SNS.pptx
+++ b/presentation/Convenience_Absenteeism_SNS.pptx
@@ -5,7 +5,7 @@
     <p:sldMasterId id="2147483648" r:id="rId1"/>
   </p:sldMasterIdLst>
   <p:notesMasterIdLst>
-    <p:notesMasterId r:id="rId18"/>
+    <p:notesMasterId r:id="rId17"/>
   </p:notesMasterIdLst>
   <p:sldIdLst>
     <p:sldId id="267" r:id="rId2"/>
@@ -23,7 +23,6 @@
     <p:sldId id="275" r:id="rId14"/>
     <p:sldId id="265" r:id="rId15"/>
     <p:sldId id="266" r:id="rId16"/>
-    <p:sldId id="272" r:id="rId17"/>
   </p:sldIdLst>
   <p:sldSz cx="9144000" cy="5143500" type="screen16x9"/>
   <p:notesSz cx="5143500" cy="9144000"/>
@@ -129,7 +128,7 @@
     <p1510:client id="{603541E7-5331-E3C1-E408-A6252F3B76BF}" v="6" dt="2026-05-11T13:47:11.177"/>
     <p1510:client id="{6539F0BB-22E5-98F5-1BAA-141B632980B9}" v="259" dt="2026-05-11T09:25:38.797"/>
     <p1510:client id="{7D1EDD7F-54E0-B44C-A466-60417548A768}" v="37" dt="2026-05-11T10:29:45.185"/>
-    <p1510:client id="{91DC44DE-2CEF-47A6-B66E-F6CD15674F3A}" v="276" dt="2026-05-11T15:44:14.440"/>
+    <p1510:client id="{91DC44DE-2CEF-47A6-B66E-F6CD15674F3A}" v="385" dt="2026-05-11T17:33:28.539"/>
     <p1510:client id="{94969AAF-1060-4762-CFF0-5CD6DB59A939}" v="50" dt="2026-05-11T11:53:24.024"/>
     <p1510:client id="{9CCD3E89-6732-3196-6744-11A3B978DB65}" v="656" dt="2026-05-11T10:35:03.914"/>
     <p1510:client id="{AE8CA066-1936-9448-5788-7378064267CD}" v="674" dt="2026-05-11T15:48:04.074"/>
@@ -251,18 +250,50 @@
     </pc:docChg>
   </pc:docChgLst>
   <pc:docChgLst>
+    <pc:chgData name="Guest User" providerId="Windows Live" clId="Web-{62BD49E6-0858-2EE0-0C40-195603B9F036}"/>
+    <pc:docChg chg="addSld">
+      <pc:chgData name="Guest User" userId="" providerId="Windows Live" clId="Web-{62BD49E6-0858-2EE0-0C40-195603B9F036}" dt="2026-05-08T09:41:35.155" v="3"/>
+      <pc:docMkLst>
+        <pc:docMk/>
+      </pc:docMkLst>
+      <pc:sldChg chg="new">
+        <pc:chgData name="Guest User" userId="" providerId="Windows Live" clId="Web-{62BD49E6-0858-2EE0-0C40-195603B9F036}" dt="2026-05-08T09:41:34.358" v="0"/>
+        <pc:sldMkLst>
+          <pc:docMk/>
+          <pc:sldMk cId="3483896755" sldId="268"/>
+        </pc:sldMkLst>
+      </pc:sldChg>
+    </pc:docChg>
+  </pc:docChgLst>
+  <pc:docChgLst>
     <pc:chgData name="André Vicente" userId="11f41fb38983a479" providerId="LiveId" clId="{06CC9840-C2E6-42EC-A177-6AB845B82D38}"/>
     <pc:docChg chg="undo custSel addSld delSld modSld">
-      <pc:chgData name="André Vicente" userId="11f41fb38983a479" providerId="LiveId" clId="{06CC9840-C2E6-42EC-A177-6AB845B82D38}" dt="2026-05-11T15:43:42.535" v="275" actId="14100"/>
+      <pc:chgData name="André Vicente" userId="11f41fb38983a479" providerId="LiveId" clId="{06CC9840-C2E6-42EC-A177-6AB845B82D38}" dt="2026-05-11T17:33:28.539" v="381" actId="47"/>
       <pc:docMkLst>
         <pc:docMk/>
       </pc:docMkLst>
       <pc:sldChg chg="modSp mod">
-        <pc:chgData name="André Vicente" userId="11f41fb38983a479" providerId="LiveId" clId="{06CC9840-C2E6-42EC-A177-6AB845B82D38}" dt="2026-05-11T09:52:36.825" v="4" actId="20577"/>
+        <pc:chgData name="André Vicente" userId="11f41fb38983a479" providerId="LiveId" clId="{06CC9840-C2E6-42EC-A177-6AB845B82D38}" dt="2026-05-11T17:31:06.499" v="380" actId="20577"/>
         <pc:sldMkLst>
           <pc:docMk/>
           <pc:sldMk cId="0" sldId="257"/>
         </pc:sldMkLst>
+        <pc:spChg chg="mod">
+          <ac:chgData name="André Vicente" userId="11f41fb38983a479" providerId="LiveId" clId="{06CC9840-C2E6-42EC-A177-6AB845B82D38}" dt="2026-05-11T17:29:30.050" v="284" actId="1076"/>
+          <ac:spMkLst>
+            <pc:docMk/>
+            <pc:sldMk cId="0" sldId="257"/>
+            <ac:spMk id="4" creationId="{00000000-0000-0000-0000-000000000000}"/>
+          </ac:spMkLst>
+        </pc:spChg>
+        <pc:spChg chg="mod">
+          <ac:chgData name="André Vicente" userId="11f41fb38983a479" providerId="LiveId" clId="{06CC9840-C2E6-42EC-A177-6AB845B82D38}" dt="2026-05-11T17:31:06.499" v="380" actId="20577"/>
+          <ac:spMkLst>
+            <pc:docMk/>
+            <pc:sldMk cId="0" sldId="257"/>
+            <ac:spMk id="5" creationId="{00000000-0000-0000-0000-000000000000}"/>
+          </ac:spMkLst>
+        </pc:spChg>
         <pc:spChg chg="mod">
           <ac:chgData name="André Vicente" userId="11f41fb38983a479" providerId="LiveId" clId="{06CC9840-C2E6-42EC-A177-6AB845B82D38}" dt="2026-05-11T09:52:36.825" v="4" actId="20577"/>
           <ac:spMkLst>
@@ -966,8 +997,8 @@
           </ac:spMkLst>
         </pc:spChg>
       </pc:sldChg>
-      <pc:sldChg chg="modSp mod">
-        <pc:chgData name="André Vicente" userId="11f41fb38983a479" providerId="LiveId" clId="{06CC9840-C2E6-42EC-A177-6AB845B82D38}" dt="2026-05-11T11:57:23.624" v="16" actId="20577"/>
+      <pc:sldChg chg="modSp del mod">
+        <pc:chgData name="André Vicente" userId="11f41fb38983a479" providerId="LiveId" clId="{06CC9840-C2E6-42EC-A177-6AB845B82D38}" dt="2026-05-11T17:33:28.539" v="381" actId="47"/>
         <pc:sldMkLst>
           <pc:docMk/>
           <pc:sldMk cId="2589345480" sldId="272"/>
@@ -1010,22 +1041,6 @@
             <ac:spMk id="3" creationId="{25FB1CE4-44CE-5D6A-4284-7EB79C539937}"/>
           </ac:spMkLst>
         </pc:spChg>
-      </pc:sldChg>
-    </pc:docChg>
-  </pc:docChgLst>
-  <pc:docChgLst>
-    <pc:chgData name="Guest User" providerId="Windows Live" clId="Web-{62BD49E6-0858-2EE0-0C40-195603B9F036}"/>
-    <pc:docChg chg="addSld">
-      <pc:chgData name="Guest User" userId="" providerId="Windows Live" clId="Web-{62BD49E6-0858-2EE0-0C40-195603B9F036}" dt="2026-05-08T09:41:35.155" v="3"/>
-      <pc:docMkLst>
-        <pc:docMk/>
-      </pc:docMkLst>
-      <pc:sldChg chg="new">
-        <pc:chgData name="Guest User" userId="" providerId="Windows Live" clId="Web-{62BD49E6-0858-2EE0-0C40-195603B9F036}" dt="2026-05-08T09:41:34.358" v="0"/>
-        <pc:sldMkLst>
-          <pc:docMk/>
-          <pc:sldMk cId="3483896755" sldId="268"/>
-        </pc:sldMkLst>
       </pc:sldChg>
     </pc:docChg>
   </pc:docChgLst>
@@ -9326,1262 +9341,6 @@
 </p:sld>
 </file>
 
-<file path=ppt/slides/slide16.xml><?xml version="1.0" encoding="utf-8"?>
-<p:sld xmlns:a="http://schemas.openxmlformats.org/drawingml/2006/main" xmlns:r="http://schemas.openxmlformats.org/officeDocument/2006/relationships" xmlns:p="http://schemas.openxmlformats.org/presentationml/2006/main">
-  <p:cSld>
-    <p:spTree>
-      <p:nvGrpSpPr>
-        <p:cNvPr id="1" name="">
-          <a:extLst>
-            <a:ext uri="{FF2B5EF4-FFF2-40B4-BE49-F238E27FC236}">
-              <a16:creationId xmlns:a16="http://schemas.microsoft.com/office/drawing/2014/main" id="{06F3960C-0D70-D971-9F31-4131AA9AF06E}"/>
-            </a:ext>
-          </a:extLst>
-        </p:cNvPr>
-        <p:cNvGrpSpPr/>
-        <p:nvPr/>
-      </p:nvGrpSpPr>
-      <p:grpSpPr>
-        <a:xfrm>
-          <a:off x="0" y="0"/>
-          <a:ext cx="0" cy="0"/>
-          <a:chOff x="0" y="0"/>
-          <a:chExt cx="0" cy="0"/>
-        </a:xfrm>
-      </p:grpSpPr>
-      <p:sp>
-        <p:nvSpPr>
-          <p:cNvPr id="3" name="Text 1">
-            <a:extLst>
-              <a:ext uri="{FF2B5EF4-FFF2-40B4-BE49-F238E27FC236}">
-                <a16:creationId xmlns:a16="http://schemas.microsoft.com/office/drawing/2014/main" id="{ABFF8429-60D5-7672-8206-EC672A830A45}"/>
-              </a:ext>
-            </a:extLst>
-          </p:cNvPr>
-          <p:cNvSpPr/>
-          <p:nvPr/>
-        </p:nvSpPr>
-        <p:spPr>
-          <a:xfrm>
-            <a:off x="457200" y="182880"/>
-            <a:ext cx="8229600" cy="502920"/>
-          </a:xfrm>
-          <a:prstGeom prst="rect">
-            <a:avLst/>
-          </a:prstGeom>
-          <a:noFill/>
-          <a:ln/>
-        </p:spPr>
-        <p:txBody>
-          <a:bodyPr wrap="square" lIns="91440" tIns="45720" rIns="91440" bIns="45720" rtlCol="0" anchor="ctr"/>
-          <a:lstStyle/>
-          <a:p>
-            <a:r>
-              <a:rPr lang="en-US" sz="2800" b="1">
-                <a:solidFill>
-                  <a:srgbClr val="0A2342"/>
-                </a:solidFill>
-                <a:latin typeface="Calibri"/>
-                <a:ea typeface="Calibri"/>
-                <a:cs typeface="Calibri"/>
-              </a:rPr>
-              <a:t>Projection </a:t>
-            </a:r>
-            <a:endParaRPr lang="pt-PT"/>
-          </a:p>
-        </p:txBody>
-      </p:sp>
-      <p:sp>
-        <p:nvSpPr>
-          <p:cNvPr id="5" name="Shape 0">
-            <a:extLst>
-              <a:ext uri="{FF2B5EF4-FFF2-40B4-BE49-F238E27FC236}">
-                <a16:creationId xmlns:a16="http://schemas.microsoft.com/office/drawing/2014/main" id="{5F7C1637-4651-DD8A-8F71-1F14C938942B}"/>
-              </a:ext>
-            </a:extLst>
-          </p:cNvPr>
-          <p:cNvSpPr/>
-          <p:nvPr/>
-        </p:nvSpPr>
-        <p:spPr>
-          <a:xfrm>
-            <a:off x="0" y="0"/>
-            <a:ext cx="9144000" cy="54864"/>
-          </a:xfrm>
-          <a:prstGeom prst="rect">
-            <a:avLst/>
-          </a:prstGeom>
-          <a:solidFill>
-            <a:srgbClr val="028090"/>
-          </a:solidFill>
-          <a:ln w="12700">
-            <a:solidFill>
-              <a:srgbClr val="028090"/>
-            </a:solidFill>
-            <a:prstDash val="solid"/>
-          </a:ln>
-        </p:spPr>
-        <p:txBody>
-          <a:bodyPr/>
-          <a:lstStyle/>
-          <a:p>
-            <a:endParaRPr lang="pt-PT"/>
-          </a:p>
-        </p:txBody>
-      </p:sp>
-      <p:pic>
-        <p:nvPicPr>
-          <p:cNvPr id="2" name="Imagem 1" descr="Uma imagem com quadrado, Retângulo, Simetria, padrão&#10;&#10;Os conteúdos gerados por IA poderão estar incorretos.">
-            <a:extLst>
-              <a:ext uri="{FF2B5EF4-FFF2-40B4-BE49-F238E27FC236}">
-                <a16:creationId xmlns:a16="http://schemas.microsoft.com/office/drawing/2014/main" id="{D0EAA70C-5697-0282-100B-6A425EC20FB7}"/>
-              </a:ext>
-            </a:extLst>
-          </p:cNvPr>
-          <p:cNvPicPr>
-            <a:picLocks noChangeAspect="1"/>
-          </p:cNvPicPr>
-          <p:nvPr/>
-        </p:nvPicPr>
-        <p:blipFill>
-          <a:blip r:embed="rId2"/>
-          <a:stretch>
-            <a:fillRect/>
-          </a:stretch>
-        </p:blipFill>
-        <p:spPr>
-          <a:xfrm>
-            <a:off x="118241" y="1004042"/>
-            <a:ext cx="8858250" cy="3493337"/>
-          </a:xfrm>
-          <a:prstGeom prst="rect">
-            <a:avLst/>
-          </a:prstGeom>
-        </p:spPr>
-      </p:pic>
-      <p:sp>
-        <p:nvSpPr>
-          <p:cNvPr id="6" name="CaixaDeTexto 5">
-            <a:extLst>
-              <a:ext uri="{FF2B5EF4-FFF2-40B4-BE49-F238E27FC236}">
-                <a16:creationId xmlns:a16="http://schemas.microsoft.com/office/drawing/2014/main" id="{0F24684E-1D22-EAE2-C910-7C6FD69C9999}"/>
-              </a:ext>
-            </a:extLst>
-          </p:cNvPr>
-          <p:cNvSpPr txBox="1"/>
-          <p:nvPr/>
-        </p:nvSpPr>
-        <p:spPr>
-          <a:xfrm>
-            <a:off x="671071" y="1183105"/>
-            <a:ext cx="1880972" cy="338554"/>
-          </a:xfrm>
-          <a:prstGeom prst="rect">
-            <a:avLst/>
-          </a:prstGeom>
-          <a:noFill/>
-        </p:spPr>
-        <p:txBody>
-          <a:bodyPr rot="0" spcFirstLastPara="0" vertOverflow="overflow" horzOverflow="overflow" vert="horz" wrap="square" lIns="91440" tIns="45720" rIns="91440" bIns="45720" numCol="1" spcCol="0" rtlCol="0" fromWordArt="0" anchor="t" anchorCtr="0" forceAA="0" compatLnSpc="1">
-            <a:prstTxWarp prst="textNoShape">
-              <a:avLst/>
-            </a:prstTxWarp>
-            <a:spAutoFit/>
-          </a:bodyPr>
-          <a:lstStyle/>
-          <a:p>
-            <a:r>
-              <a:rPr lang="en-US" sz="1600" b="1">
-                <a:solidFill>
-                  <a:schemeClr val="accent1">
-                    <a:lumMod val="76000"/>
-                  </a:schemeClr>
-                </a:solidFill>
-              </a:rPr>
-              <a:t>Time </a:t>
-            </a:r>
-            <a:r>
-              <a:rPr lang="en-US" sz="1600" b="1">
-                <a:solidFill>
-                  <a:schemeClr val="accent1">
-                    <a:lumMod val="76000"/>
-                  </a:schemeClr>
-                </a:solidFill>
-                <a:ea typeface="+mn-lt"/>
-                <a:cs typeface="+mn-lt"/>
-              </a:rPr>
-              <a:t>Horizon</a:t>
-            </a:r>
-            <a:endParaRPr lang="en-US" sz="1600" b="1">
-              <a:solidFill>
-                <a:schemeClr val="accent1">
-                  <a:lumMod val="76000"/>
-                </a:schemeClr>
-              </a:solidFill>
-              <a:ea typeface="Calibri"/>
-              <a:cs typeface="Calibri"/>
-            </a:endParaRPr>
-          </a:p>
-        </p:txBody>
-      </p:sp>
-      <p:sp>
-        <p:nvSpPr>
-          <p:cNvPr id="7" name="CaixaDeTexto 6">
-            <a:extLst>
-              <a:ext uri="{FF2B5EF4-FFF2-40B4-BE49-F238E27FC236}">
-                <a16:creationId xmlns:a16="http://schemas.microsoft.com/office/drawing/2014/main" id="{7E6B4A83-E1B9-2A7B-28A4-A276D66D4D7E}"/>
-              </a:ext>
-            </a:extLst>
-          </p:cNvPr>
-          <p:cNvSpPr txBox="1"/>
-          <p:nvPr/>
-        </p:nvSpPr>
-        <p:spPr>
-          <a:xfrm>
-            <a:off x="3673433" y="1183104"/>
-            <a:ext cx="1880972" cy="338554"/>
-          </a:xfrm>
-          <a:prstGeom prst="rect">
-            <a:avLst/>
-          </a:prstGeom>
-          <a:noFill/>
-        </p:spPr>
-        <p:txBody>
-          <a:bodyPr rot="0" spcFirstLastPara="0" vertOverflow="overflow" horzOverflow="overflow" vert="horz" wrap="square" lIns="91440" tIns="45720" rIns="91440" bIns="45720" numCol="1" spcCol="0" rtlCol="0" fromWordArt="0" anchor="t" anchorCtr="0" forceAA="0" compatLnSpc="1">
-            <a:prstTxWarp prst="textNoShape">
-              <a:avLst/>
-            </a:prstTxWarp>
-            <a:spAutoFit/>
-          </a:bodyPr>
-          <a:lstStyle/>
-          <a:p>
-            <a:r>
-              <a:rPr lang="en-US" sz="1600" b="1">
-                <a:solidFill>
-                  <a:schemeClr val="accent6">
-                    <a:lumMod val="49000"/>
-                  </a:schemeClr>
-                </a:solidFill>
-              </a:rPr>
-              <a:t>Future Gripe</a:t>
-            </a:r>
-            <a:endParaRPr lang="pt-PT">
-              <a:solidFill>
-                <a:schemeClr val="accent6">
-                  <a:lumMod val="49000"/>
-                </a:schemeClr>
-              </a:solidFill>
-              <a:ea typeface="Calibri"/>
-              <a:cs typeface="Calibri"/>
-            </a:endParaRPr>
-          </a:p>
-        </p:txBody>
-      </p:sp>
-      <p:sp>
-        <p:nvSpPr>
-          <p:cNvPr id="8" name="CaixaDeTexto 7">
-            <a:extLst>
-              <a:ext uri="{FF2B5EF4-FFF2-40B4-BE49-F238E27FC236}">
-                <a16:creationId xmlns:a16="http://schemas.microsoft.com/office/drawing/2014/main" id="{633824F4-685C-C297-2E3F-E2C674ED2786}"/>
-              </a:ext>
-            </a:extLst>
-          </p:cNvPr>
-          <p:cNvSpPr txBox="1"/>
-          <p:nvPr/>
-        </p:nvSpPr>
-        <p:spPr>
-          <a:xfrm>
-            <a:off x="625089" y="2987841"/>
-            <a:ext cx="1880972" cy="338554"/>
-          </a:xfrm>
-          <a:prstGeom prst="rect">
-            <a:avLst/>
-          </a:prstGeom>
-          <a:noFill/>
-        </p:spPr>
-        <p:txBody>
-          <a:bodyPr rot="0" spcFirstLastPara="0" vertOverflow="overflow" horzOverflow="overflow" vert="horz" wrap="square" lIns="91440" tIns="45720" rIns="91440" bIns="45720" numCol="1" spcCol="0" rtlCol="0" fromWordArt="0" anchor="t" anchorCtr="0" forceAA="0" compatLnSpc="1">
-            <a:prstTxWarp prst="textNoShape">
-              <a:avLst/>
-            </a:prstTxWarp>
-            <a:spAutoFit/>
-          </a:bodyPr>
-          <a:lstStyle/>
-          <a:p>
-            <a:r>
-              <a:rPr lang="en-US" sz="1600" b="1">
-                <a:solidFill>
-                  <a:schemeClr val="accent2"/>
-                </a:solidFill>
-              </a:rPr>
-              <a:t>Fourier Terms</a:t>
-            </a:r>
-            <a:endParaRPr lang="pt-PT">
-              <a:solidFill>
-                <a:schemeClr val="accent2"/>
-              </a:solidFill>
-              <a:ea typeface="Calibri"/>
-              <a:cs typeface="Calibri"/>
-            </a:endParaRPr>
-          </a:p>
-        </p:txBody>
-      </p:sp>
-      <p:sp>
-        <p:nvSpPr>
-          <p:cNvPr id="9" name="CaixaDeTexto 8">
-            <a:extLst>
-              <a:ext uri="{FF2B5EF4-FFF2-40B4-BE49-F238E27FC236}">
-                <a16:creationId xmlns:a16="http://schemas.microsoft.com/office/drawing/2014/main" id="{BB45CBAB-C16B-12D0-E026-DA2653891CFB}"/>
-              </a:ext>
-            </a:extLst>
-          </p:cNvPr>
-          <p:cNvSpPr txBox="1"/>
-          <p:nvPr/>
-        </p:nvSpPr>
-        <p:spPr>
-          <a:xfrm>
-            <a:off x="6653497" y="1163397"/>
-            <a:ext cx="1880972" cy="338554"/>
-          </a:xfrm>
-          <a:prstGeom prst="rect">
-            <a:avLst/>
-          </a:prstGeom>
-          <a:noFill/>
-        </p:spPr>
-        <p:txBody>
-          <a:bodyPr rot="0" spcFirstLastPara="0" vertOverflow="overflow" horzOverflow="overflow" vert="horz" wrap="square" lIns="91440" tIns="45720" rIns="91440" bIns="45720" numCol="1" spcCol="0" rtlCol="0" fromWordArt="0" anchor="t" anchorCtr="0" forceAA="0" compatLnSpc="1">
-            <a:prstTxWarp prst="textNoShape">
-              <a:avLst/>
-            </a:prstTxWarp>
-            <a:spAutoFit/>
-          </a:bodyPr>
-          <a:lstStyle/>
-          <a:p>
-            <a:r>
-              <a:rPr lang="en-US" sz="1600" b="1">
-                <a:solidFill>
-                  <a:srgbClr val="7030A0"/>
-                </a:solidFill>
-              </a:rPr>
-              <a:t>Calendar Dummies</a:t>
-            </a:r>
-            <a:endParaRPr lang="pt-PT">
-              <a:solidFill>
-                <a:srgbClr val="7030A0"/>
-              </a:solidFill>
-              <a:ea typeface="Calibri"/>
-              <a:cs typeface="Calibri"/>
-            </a:endParaRPr>
-          </a:p>
-        </p:txBody>
-      </p:sp>
-      <p:sp>
-        <p:nvSpPr>
-          <p:cNvPr id="10" name="CaixaDeTexto 9">
-            <a:extLst>
-              <a:ext uri="{FF2B5EF4-FFF2-40B4-BE49-F238E27FC236}">
-                <a16:creationId xmlns:a16="http://schemas.microsoft.com/office/drawing/2014/main" id="{FFCE2E2A-55A1-B7B6-896F-5876D663C61F}"/>
-              </a:ext>
-            </a:extLst>
-          </p:cNvPr>
-          <p:cNvSpPr txBox="1"/>
-          <p:nvPr/>
-        </p:nvSpPr>
-        <p:spPr>
-          <a:xfrm>
-            <a:off x="3722701" y="2987842"/>
-            <a:ext cx="1880972" cy="338554"/>
-          </a:xfrm>
-          <a:prstGeom prst="rect">
-            <a:avLst/>
-          </a:prstGeom>
-          <a:noFill/>
-        </p:spPr>
-        <p:txBody>
-          <a:bodyPr rot="0" spcFirstLastPara="0" vertOverflow="overflow" horzOverflow="overflow" vert="horz" wrap="square" lIns="91440" tIns="45720" rIns="91440" bIns="45720" numCol="1" spcCol="0" rtlCol="0" fromWordArt="0" anchor="t" anchorCtr="0" forceAA="0" compatLnSpc="1">
-            <a:prstTxWarp prst="textNoShape">
-              <a:avLst/>
-            </a:prstTxWarp>
-            <a:spAutoFit/>
-          </a:bodyPr>
-          <a:lstStyle/>
-          <a:p>
-            <a:r>
-              <a:rPr lang="en-US" sz="1600" b="1">
-                <a:solidFill>
-                  <a:srgbClr val="0070C0"/>
-                </a:solidFill>
-              </a:rPr>
-              <a:t>Confidence Interval</a:t>
-            </a:r>
-            <a:endParaRPr lang="en-US" sz="1600" b="1">
-              <a:solidFill>
-                <a:srgbClr val="0070C0"/>
-              </a:solidFill>
-              <a:ea typeface="Calibri"/>
-              <a:cs typeface="Calibri"/>
-            </a:endParaRPr>
-          </a:p>
-        </p:txBody>
-      </p:sp>
-      <p:sp>
-        <p:nvSpPr>
-          <p:cNvPr id="11" name="CaixaDeTexto 10">
-            <a:extLst>
-              <a:ext uri="{FF2B5EF4-FFF2-40B4-BE49-F238E27FC236}">
-                <a16:creationId xmlns:a16="http://schemas.microsoft.com/office/drawing/2014/main" id="{9B6D0CC4-6E8D-CFE2-34E3-040222F10D22}"/>
-              </a:ext>
-            </a:extLst>
-          </p:cNvPr>
-          <p:cNvSpPr txBox="1"/>
-          <p:nvPr/>
-        </p:nvSpPr>
-        <p:spPr>
-          <a:xfrm>
-            <a:off x="6683057" y="2987841"/>
-            <a:ext cx="1880972" cy="338554"/>
-          </a:xfrm>
-          <a:prstGeom prst="rect">
-            <a:avLst/>
-          </a:prstGeom>
-          <a:noFill/>
-        </p:spPr>
-        <p:txBody>
-          <a:bodyPr rot="0" spcFirstLastPara="0" vertOverflow="overflow" horzOverflow="overflow" vert="horz" wrap="square" lIns="91440" tIns="45720" rIns="91440" bIns="45720" numCol="1" spcCol="0" rtlCol="0" fromWordArt="0" anchor="t" anchorCtr="0" forceAA="0" compatLnSpc="1">
-            <a:prstTxWarp prst="textNoShape">
-              <a:avLst/>
-            </a:prstTxWarp>
-            <a:spAutoFit/>
-          </a:bodyPr>
-          <a:lstStyle/>
-          <a:p>
-            <a:r>
-              <a:rPr lang="en-US" sz="1600" b="1">
-                <a:solidFill>
-                  <a:srgbClr val="C00000"/>
-                </a:solidFill>
-                <a:ea typeface="+mn-lt"/>
-                <a:cs typeface="+mn-lt"/>
-              </a:rPr>
-              <a:t>Outliers</a:t>
-            </a:r>
-            <a:endParaRPr lang="pt-PT">
-              <a:solidFill>
-                <a:srgbClr val="C00000"/>
-              </a:solidFill>
-              <a:ea typeface="Calibri"/>
-              <a:cs typeface="Calibri"/>
-            </a:endParaRPr>
-          </a:p>
-        </p:txBody>
-      </p:sp>
-      <p:sp>
-        <p:nvSpPr>
-          <p:cNvPr id="16" name="CaixaDeTexto 15">
-            <a:extLst>
-              <a:ext uri="{FF2B5EF4-FFF2-40B4-BE49-F238E27FC236}">
-                <a16:creationId xmlns:a16="http://schemas.microsoft.com/office/drawing/2014/main" id="{A7C3F4B3-E671-44BF-699C-C272CB57A16C}"/>
-              </a:ext>
-            </a:extLst>
-          </p:cNvPr>
-          <p:cNvSpPr txBox="1"/>
-          <p:nvPr/>
-        </p:nvSpPr>
-        <p:spPr>
-          <a:xfrm>
-            <a:off x="459135" y="1574131"/>
-            <a:ext cx="2447805" cy="646331"/>
-          </a:xfrm>
-          <a:prstGeom prst="rect">
-            <a:avLst/>
-          </a:prstGeom>
-          <a:noFill/>
-        </p:spPr>
-        <p:txBody>
-          <a:bodyPr rot="0" spcFirstLastPara="0" vertOverflow="overflow" horzOverflow="overflow" vert="horz" wrap="square" lIns="91440" tIns="45720" rIns="91440" bIns="45720" numCol="1" spcCol="0" rtlCol="0" fromWordArt="0" anchor="t" anchorCtr="0" forceAA="0" compatLnSpc="1">
-            <a:prstTxWarp prst="textNoShape">
-              <a:avLst/>
-            </a:prstTxWarp>
-            <a:spAutoFit/>
-          </a:bodyPr>
-          <a:lstStyle/>
-          <a:p>
-            <a:r>
-              <a:rPr lang="en-US" sz="1200"/>
-              <a:t>4 full years from the last historical date</a:t>
-            </a:r>
-            <a:endParaRPr lang="en-US" sz="1200">
-              <a:ea typeface="Calibri"/>
-              <a:cs typeface="Calibri"/>
-            </a:endParaRPr>
-          </a:p>
-          <a:p>
-            <a:r>
-              <a:rPr lang="en-US" sz="1200"/>
-              <a:t>Daily dates: </a:t>
-            </a:r>
-            <a:r>
-              <a:rPr lang="en-US" sz="1200" err="1"/>
-              <a:t>início_prev</a:t>
-            </a:r>
-            <a:r>
-              <a:rPr lang="en-US" sz="1200"/>
-              <a:t> to </a:t>
-            </a:r>
-            <a:r>
-              <a:rPr lang="en-US" sz="1200" err="1"/>
-              <a:t>fim_prev</a:t>
-            </a:r>
-            <a:endParaRPr lang="en-US" sz="1200" err="1">
-              <a:ea typeface="Calibri"/>
-              <a:cs typeface="Calibri"/>
-            </a:endParaRPr>
-          </a:p>
-        </p:txBody>
-      </p:sp>
-      <p:sp>
-        <p:nvSpPr>
-          <p:cNvPr id="18" name="CaixaDeTexto 17">
-            <a:extLst>
-              <a:ext uri="{FF2B5EF4-FFF2-40B4-BE49-F238E27FC236}">
-                <a16:creationId xmlns:a16="http://schemas.microsoft.com/office/drawing/2014/main" id="{618430B0-DA14-F345-33DB-3CD2E0C810B2}"/>
-              </a:ext>
-            </a:extLst>
-          </p:cNvPr>
-          <p:cNvSpPr txBox="1"/>
-          <p:nvPr/>
-        </p:nvSpPr>
-        <p:spPr>
-          <a:xfrm>
-            <a:off x="3358125" y="1564277"/>
-            <a:ext cx="2531126" cy="1107996"/>
-          </a:xfrm>
-          <a:prstGeom prst="rect">
-            <a:avLst/>
-          </a:prstGeom>
-          <a:noFill/>
-        </p:spPr>
-        <p:txBody>
-          <a:bodyPr rot="0" spcFirstLastPara="0" vertOverflow="overflow" horzOverflow="overflow" vert="horz" wrap="square" lIns="91440" tIns="45720" rIns="91440" bIns="45720" numCol="1" spcCol="0" rtlCol="0" fromWordArt="0" anchor="t" anchorCtr="0" forceAA="0" compatLnSpc="1">
-            <a:prstTxWarp prst="textNoShape">
-              <a:avLst/>
-            </a:prstTxWarp>
-            <a:spAutoFit/>
-          </a:bodyPr>
-          <a:lstStyle/>
-          <a:p>
-            <a:r>
-              <a:rPr lang="en-US" sz="1200"/>
-              <a:t>Historical mean </a:t>
-            </a:r>
-            <a:r>
-              <a:rPr lang="en-US" sz="1200">
-                <a:ea typeface="+mn-lt"/>
-                <a:cs typeface="+mn-lt"/>
-              </a:rPr>
-              <a:t>seasonal</a:t>
-            </a:r>
-            <a:r>
-              <a:rPr lang="en-US" sz="1200"/>
-              <a:t> profile by day-of-year</a:t>
-            </a:r>
-            <a:endParaRPr lang="en-US" sz="1200">
-              <a:ea typeface="Calibri"/>
-              <a:cs typeface="Calibri"/>
-            </a:endParaRPr>
-          </a:p>
-          <a:p>
-            <a:r>
-              <a:rPr lang="en-US" sz="1200"/>
-              <a:t>Fallback: day 60 (1 Mar) for 29 Feb in non-leap years</a:t>
-            </a:r>
-            <a:endParaRPr lang="en-US" sz="1200">
-              <a:ea typeface="Calibri"/>
-              <a:cs typeface="Calibri"/>
-            </a:endParaRPr>
-          </a:p>
-          <a:p>
-            <a:pPr algn="ctr"/>
-            <a:endParaRPr lang="pt-PT"/>
-          </a:p>
-        </p:txBody>
-      </p:sp>
-      <p:sp>
-        <p:nvSpPr>
-          <p:cNvPr id="27" name="CaixaDeTexto 26">
-            <a:extLst>
-              <a:ext uri="{FF2B5EF4-FFF2-40B4-BE49-F238E27FC236}">
-                <a16:creationId xmlns:a16="http://schemas.microsoft.com/office/drawing/2014/main" id="{23867D4D-5634-D6C2-0BDE-74A06B7F9D11}"/>
-              </a:ext>
-            </a:extLst>
-          </p:cNvPr>
-          <p:cNvSpPr txBox="1"/>
-          <p:nvPr/>
-        </p:nvSpPr>
-        <p:spPr>
-          <a:xfrm>
-            <a:off x="6336977" y="1574476"/>
-            <a:ext cx="2698635" cy="830997"/>
-          </a:xfrm>
-          <a:prstGeom prst="rect">
-            <a:avLst/>
-          </a:prstGeom>
-          <a:noFill/>
-        </p:spPr>
-        <p:txBody>
-          <a:bodyPr rot="0" spcFirstLastPara="0" vertOverflow="overflow" horzOverflow="overflow" vert="horz" wrap="square" lIns="91440" tIns="45720" rIns="91440" bIns="45720" numCol="1" spcCol="0" rtlCol="0" fromWordArt="0" anchor="t" anchorCtr="0" forceAA="0" compatLnSpc="1">
-            <a:prstTxWarp prst="textNoShape">
-              <a:avLst/>
-            </a:prstTxWarp>
-            <a:spAutoFit/>
-          </a:bodyPr>
-          <a:lstStyle/>
-          <a:p>
-            <a:r>
-              <a:rPr lang="en-US" sz="1200">
-                <a:ea typeface="+mn-lt"/>
-                <a:cs typeface="+mn-lt"/>
-              </a:rPr>
-              <a:t>Public holidays + Tolerance days + Bridge days</a:t>
-            </a:r>
-            <a:endParaRPr lang="pt-PT" sz="1200">
-              <a:ea typeface="Calibri"/>
-              <a:cs typeface="Calibri"/>
-            </a:endParaRPr>
-          </a:p>
-          <a:p>
-            <a:r>
-              <a:rPr lang="en-US" sz="1200">
-                <a:ea typeface="+mn-lt"/>
-                <a:cs typeface="+mn-lt"/>
-              </a:rPr>
-              <a:t>Computed for 2026-2030 with the same hierarchy</a:t>
-            </a:r>
-            <a:endParaRPr lang="en-US" sz="1200"/>
-          </a:p>
-        </p:txBody>
-      </p:sp>
-      <p:sp>
-        <p:nvSpPr>
-          <p:cNvPr id="28" name="CaixaDeTexto 27">
-            <a:extLst>
-              <a:ext uri="{FF2B5EF4-FFF2-40B4-BE49-F238E27FC236}">
-                <a16:creationId xmlns:a16="http://schemas.microsoft.com/office/drawing/2014/main" id="{B694863A-512B-05B7-B07C-1130A483B579}"/>
-              </a:ext>
-            </a:extLst>
-          </p:cNvPr>
-          <p:cNvSpPr txBox="1"/>
-          <p:nvPr/>
-        </p:nvSpPr>
-        <p:spPr>
-          <a:xfrm>
-            <a:off x="393099" y="3494170"/>
-            <a:ext cx="2698635" cy="646331"/>
-          </a:xfrm>
-          <a:prstGeom prst="rect">
-            <a:avLst/>
-          </a:prstGeom>
-          <a:noFill/>
-        </p:spPr>
-        <p:txBody>
-          <a:bodyPr rot="0" spcFirstLastPara="0" vertOverflow="overflow" horzOverflow="overflow" vert="horz" wrap="square" lIns="91440" tIns="45720" rIns="91440" bIns="45720" numCol="1" spcCol="0" rtlCol="0" fromWordArt="0" anchor="t" anchorCtr="0" forceAA="0" compatLnSpc="1">
-            <a:prstTxWarp prst="textNoShape">
-              <a:avLst/>
-            </a:prstTxWarp>
-            <a:spAutoFit/>
-          </a:bodyPr>
-          <a:lstStyle/>
-          <a:p>
-            <a:r>
-              <a:rPr lang="en-US" sz="1200">
-                <a:ea typeface="+mn-lt"/>
-                <a:cs typeface="+mn-lt"/>
-              </a:rPr>
-              <a:t>K=5 pares, </a:t>
-            </a:r>
-            <a:r>
-              <a:rPr lang="en-US" sz="1200" err="1">
-                <a:ea typeface="+mn-lt"/>
-                <a:cs typeface="+mn-lt"/>
-              </a:rPr>
-              <a:t>freq</a:t>
-            </a:r>
-            <a:r>
-              <a:rPr lang="en-US" sz="1200">
-                <a:ea typeface="+mn-lt"/>
-                <a:cs typeface="+mn-lt"/>
-              </a:rPr>
-              <a:t>=365.25</a:t>
-            </a:r>
-            <a:endParaRPr lang="pt-PT" sz="1200">
-              <a:ea typeface="Calibri"/>
-              <a:cs typeface="Calibri"/>
-            </a:endParaRPr>
-          </a:p>
-          <a:p>
-            <a:r>
-              <a:rPr lang="en-US" sz="1200">
-                <a:ea typeface="+mn-lt"/>
-                <a:cs typeface="+mn-lt"/>
-              </a:rPr>
-              <a:t>Continuation of the historical series (unbroken)</a:t>
-            </a:r>
-            <a:endParaRPr lang="en-US" sz="1200"/>
-          </a:p>
-        </p:txBody>
-      </p:sp>
-      <p:sp>
-        <p:nvSpPr>
-          <p:cNvPr id="29" name="CaixaDeTexto 28">
-            <a:extLst>
-              <a:ext uri="{FF2B5EF4-FFF2-40B4-BE49-F238E27FC236}">
-                <a16:creationId xmlns:a16="http://schemas.microsoft.com/office/drawing/2014/main" id="{F73136A0-1BEB-BBC6-EF01-37B3774C2E60}"/>
-              </a:ext>
-            </a:extLst>
-          </p:cNvPr>
-          <p:cNvSpPr txBox="1"/>
-          <p:nvPr/>
-        </p:nvSpPr>
-        <p:spPr>
-          <a:xfrm>
-            <a:off x="3467031" y="3363828"/>
-            <a:ext cx="2512976" cy="738664"/>
-          </a:xfrm>
-          <a:prstGeom prst="rect">
-            <a:avLst/>
-          </a:prstGeom>
-          <a:noFill/>
-        </p:spPr>
-        <p:txBody>
-          <a:bodyPr rot="0" spcFirstLastPara="0" vertOverflow="overflow" horzOverflow="overflow" vert="horz" wrap="square" lIns="91440" tIns="45720" rIns="91440" bIns="45720" numCol="1" spcCol="0" rtlCol="0" fromWordArt="0" anchor="t" anchorCtr="0" forceAA="0" compatLnSpc="1">
-            <a:prstTxWarp prst="textNoShape">
-              <a:avLst/>
-            </a:prstTxWarp>
-            <a:spAutoFit/>
-          </a:bodyPr>
-          <a:lstStyle/>
-          <a:p>
-            <a:r>
-              <a:rPr lang="en-US" sz="1200"/>
-              <a:t>Conformally calibrated CI80 and CI95</a:t>
-            </a:r>
-            <a:endParaRPr lang="en-US" sz="1200">
-              <a:ea typeface="Calibri"/>
-              <a:cs typeface="Calibri"/>
-            </a:endParaRPr>
-          </a:p>
-          <a:p>
-            <a:r>
-              <a:rPr lang="en-US" sz="1200"/>
-              <a:t>Fixed half-width: q₈₀ and q̂ ADD/day</a:t>
-            </a:r>
-            <a:endParaRPr lang="en-US" sz="1200">
-              <a:ea typeface="Calibri"/>
-              <a:cs typeface="Calibri"/>
-            </a:endParaRPr>
-          </a:p>
-          <a:p>
-            <a:pPr algn="ctr"/>
-            <a:endParaRPr lang="pt-PT"/>
-          </a:p>
-        </p:txBody>
-      </p:sp>
-      <p:sp>
-        <p:nvSpPr>
-          <p:cNvPr id="30" name="CaixaDeTexto 29">
-            <a:extLst>
-              <a:ext uri="{FF2B5EF4-FFF2-40B4-BE49-F238E27FC236}">
-                <a16:creationId xmlns:a16="http://schemas.microsoft.com/office/drawing/2014/main" id="{1E3CFA80-2C31-2AFB-7960-B6B4D1399C66}"/>
-              </a:ext>
-            </a:extLst>
-          </p:cNvPr>
-          <p:cNvSpPr txBox="1"/>
-          <p:nvPr/>
-        </p:nvSpPr>
-        <p:spPr>
-          <a:xfrm>
-            <a:off x="6311738" y="3324502"/>
-            <a:ext cx="2419022" cy="1107996"/>
-          </a:xfrm>
-          <a:prstGeom prst="rect">
-            <a:avLst/>
-          </a:prstGeom>
-          <a:noFill/>
-        </p:spPr>
-        <p:txBody>
-          <a:bodyPr rot="0" spcFirstLastPara="0" vertOverflow="overflow" horzOverflow="overflow" vert="horz" wrap="square" lIns="91440" tIns="45720" rIns="91440" bIns="45720" numCol="1" spcCol="0" rtlCol="0" fromWordArt="0" anchor="t" anchorCtr="0" forceAA="0" compatLnSpc="1">
-            <a:prstTxWarp prst="textNoShape">
-              <a:avLst/>
-            </a:prstTxWarp>
-            <a:spAutoFit/>
-          </a:bodyPr>
-          <a:lstStyle/>
-          <a:p>
-            <a:r>
-              <a:rPr lang="en-US" sz="1200"/>
-              <a:t>Historical outlier dummies → 0 in the future</a:t>
-            </a:r>
-            <a:endParaRPr lang="en-US" sz="1200">
-              <a:ea typeface="Calibri"/>
-              <a:cs typeface="Calibri"/>
-            </a:endParaRPr>
-          </a:p>
-          <a:p>
-            <a:r>
-              <a:rPr lang="en-US" sz="1200"/>
-              <a:t>(uncertainty incorporated via conformal CI)</a:t>
-            </a:r>
-            <a:endParaRPr lang="en-US" sz="1200">
-              <a:ea typeface="Calibri"/>
-              <a:cs typeface="Calibri"/>
-            </a:endParaRPr>
-          </a:p>
-          <a:p>
-            <a:pPr algn="ctr"/>
-            <a:endParaRPr lang="pt-PT"/>
-          </a:p>
-        </p:txBody>
-      </p:sp>
-      <p:pic>
-        <p:nvPicPr>
-          <p:cNvPr id="32" name="Imagem 31">
-            <a:extLst>
-              <a:ext uri="{FF2B5EF4-FFF2-40B4-BE49-F238E27FC236}">
-                <a16:creationId xmlns:a16="http://schemas.microsoft.com/office/drawing/2014/main" id="{4240B68F-7000-FD34-1AAE-B0F7D67BEBE8}"/>
-              </a:ext>
-            </a:extLst>
-          </p:cNvPr>
-          <p:cNvPicPr>
-            <a:picLocks noChangeAspect="1"/>
-          </p:cNvPicPr>
-          <p:nvPr/>
-        </p:nvPicPr>
-        <p:blipFill>
-          <a:blip r:embed="rId3"/>
-          <a:stretch>
-            <a:fillRect/>
-          </a:stretch>
-        </p:blipFill>
-        <p:spPr>
-          <a:xfrm>
-            <a:off x="248583" y="1102895"/>
-            <a:ext cx="120403" cy="1524865"/>
-          </a:xfrm>
-          <a:prstGeom prst="rect">
-            <a:avLst/>
-          </a:prstGeom>
-        </p:spPr>
-      </p:pic>
-      <p:pic>
-        <p:nvPicPr>
-          <p:cNvPr id="33" name="Imagem 32">
-            <a:extLst>
-              <a:ext uri="{FF2B5EF4-FFF2-40B4-BE49-F238E27FC236}">
-                <a16:creationId xmlns:a16="http://schemas.microsoft.com/office/drawing/2014/main" id="{B7C655C5-4F3C-C044-4072-95E1BA14D95E}"/>
-              </a:ext>
-            </a:extLst>
-          </p:cNvPr>
-          <p:cNvPicPr>
-            <a:picLocks noChangeAspect="1"/>
-          </p:cNvPicPr>
-          <p:nvPr/>
-        </p:nvPicPr>
-        <p:blipFill>
-          <a:blip r:embed="rId4"/>
-          <a:stretch>
-            <a:fillRect/>
-          </a:stretch>
-        </p:blipFill>
-        <p:spPr>
-          <a:xfrm>
-            <a:off x="3217409" y="1092868"/>
-            <a:ext cx="145469" cy="1534892"/>
-          </a:xfrm>
-          <a:prstGeom prst="rect">
-            <a:avLst/>
-          </a:prstGeom>
-        </p:spPr>
-      </p:pic>
-      <p:pic>
-        <p:nvPicPr>
-          <p:cNvPr id="34" name="Imagem 33">
-            <a:extLst>
-              <a:ext uri="{FF2B5EF4-FFF2-40B4-BE49-F238E27FC236}">
-                <a16:creationId xmlns:a16="http://schemas.microsoft.com/office/drawing/2014/main" id="{4F48B593-4D6E-E39E-54F9-9C3EB5134C8C}"/>
-              </a:ext>
-            </a:extLst>
-          </p:cNvPr>
-          <p:cNvPicPr>
-            <a:picLocks noChangeAspect="1"/>
-          </p:cNvPicPr>
-          <p:nvPr/>
-        </p:nvPicPr>
-        <p:blipFill>
-          <a:blip r:embed="rId5"/>
-          <a:stretch>
-            <a:fillRect/>
-          </a:stretch>
-        </p:blipFill>
-        <p:spPr>
-          <a:xfrm>
-            <a:off x="6167222" y="1087855"/>
-            <a:ext cx="105364" cy="1529878"/>
-          </a:xfrm>
-          <a:prstGeom prst="rect">
-            <a:avLst/>
-          </a:prstGeom>
-        </p:spPr>
-      </p:pic>
-      <p:pic>
-        <p:nvPicPr>
-          <p:cNvPr id="35" name="Imagem 34">
-            <a:extLst>
-              <a:ext uri="{FF2B5EF4-FFF2-40B4-BE49-F238E27FC236}">
-                <a16:creationId xmlns:a16="http://schemas.microsoft.com/office/drawing/2014/main" id="{3F41CE58-200D-4C79-5BED-5C541138E9DA}"/>
-              </a:ext>
-            </a:extLst>
-          </p:cNvPr>
-          <p:cNvPicPr>
-            <a:picLocks noChangeAspect="1"/>
-          </p:cNvPicPr>
-          <p:nvPr/>
-        </p:nvPicPr>
-        <p:blipFill>
-          <a:blip r:embed="rId6"/>
-          <a:stretch>
-            <a:fillRect/>
-          </a:stretch>
-        </p:blipFill>
-        <p:spPr>
-          <a:xfrm>
-            <a:off x="278488" y="2847663"/>
-            <a:ext cx="90325" cy="1515841"/>
-          </a:xfrm>
-          <a:prstGeom prst="rect">
-            <a:avLst/>
-          </a:prstGeom>
-        </p:spPr>
-      </p:pic>
-      <p:pic>
-        <p:nvPicPr>
-          <p:cNvPr id="36" name="Imagem 35">
-            <a:extLst>
-              <a:ext uri="{FF2B5EF4-FFF2-40B4-BE49-F238E27FC236}">
-                <a16:creationId xmlns:a16="http://schemas.microsoft.com/office/drawing/2014/main" id="{4D636EC7-2102-2E89-80BF-26F5176C4F90}"/>
-              </a:ext>
-            </a:extLst>
-          </p:cNvPr>
-          <p:cNvPicPr>
-            <a:picLocks noChangeAspect="1"/>
-          </p:cNvPicPr>
-          <p:nvPr/>
-        </p:nvPicPr>
-        <p:blipFill>
-          <a:blip r:embed="rId7"/>
-          <a:stretch>
-            <a:fillRect/>
-          </a:stretch>
-        </p:blipFill>
-        <p:spPr>
-          <a:xfrm>
-            <a:off x="3217410" y="2822943"/>
-            <a:ext cx="140456" cy="1530881"/>
-          </a:xfrm>
-          <a:prstGeom prst="rect">
-            <a:avLst/>
-          </a:prstGeom>
-        </p:spPr>
-      </p:pic>
-      <p:pic>
-        <p:nvPicPr>
-          <p:cNvPr id="37" name="Imagem 36">
-            <a:extLst>
-              <a:ext uri="{FF2B5EF4-FFF2-40B4-BE49-F238E27FC236}">
-                <a16:creationId xmlns:a16="http://schemas.microsoft.com/office/drawing/2014/main" id="{C9891525-1D79-C0C0-B4EE-E9D331772600}"/>
-              </a:ext>
-            </a:extLst>
-          </p:cNvPr>
-          <p:cNvPicPr>
-            <a:picLocks noChangeAspect="1"/>
-          </p:cNvPicPr>
-          <p:nvPr/>
-        </p:nvPicPr>
-        <p:blipFill>
-          <a:blip r:embed="rId8"/>
-          <a:stretch>
-            <a:fillRect/>
-          </a:stretch>
-        </p:blipFill>
-        <p:spPr>
-          <a:xfrm>
-            <a:off x="6162207" y="2827956"/>
-            <a:ext cx="90326" cy="1510829"/>
-          </a:xfrm>
-          <a:prstGeom prst="rect">
-            <a:avLst/>
-          </a:prstGeom>
-        </p:spPr>
-      </p:pic>
-      <p:sp>
-        <p:nvSpPr>
-          <p:cNvPr id="4" name="CaixaDeTexto 3">
-            <a:extLst>
-              <a:ext uri="{FF2B5EF4-FFF2-40B4-BE49-F238E27FC236}">
-                <a16:creationId xmlns:a16="http://schemas.microsoft.com/office/drawing/2014/main" id="{D008CAD6-A45D-C5D6-27C3-0746BD6175C6}"/>
-              </a:ext>
-            </a:extLst>
-          </p:cNvPr>
-          <p:cNvSpPr txBox="1"/>
-          <p:nvPr/>
-        </p:nvSpPr>
-        <p:spPr>
-          <a:xfrm>
-            <a:off x="339945" y="1192268"/>
-            <a:ext cx="468039" cy="646331"/>
-          </a:xfrm>
-          <a:prstGeom prst="rect">
-            <a:avLst/>
-          </a:prstGeom>
-          <a:noFill/>
-        </p:spPr>
-        <p:txBody>
-          <a:bodyPr rot="0" spcFirstLastPara="0" vertOverflow="overflow" horzOverflow="overflow" vert="horz" wrap="square" lIns="91440" tIns="45720" rIns="91440" bIns="45720" numCol="1" spcCol="0" rtlCol="0" fromWordArt="0" anchor="t" anchorCtr="0" forceAA="0" compatLnSpc="1">
-            <a:prstTxWarp prst="textNoShape">
-              <a:avLst/>
-            </a:prstTxWarp>
-            <a:spAutoFit/>
-          </a:bodyPr>
-          <a:lstStyle/>
-          <a:p>
-            <a:r>
-              <a:rPr lang="en-US">
-                <a:solidFill>
-                  <a:srgbClr val="0070C0"/>
-                </a:solidFill>
-              </a:rPr>
-              <a:t>📅 </a:t>
-            </a:r>
-            <a:endParaRPr lang="en-US">
-              <a:solidFill>
-                <a:srgbClr val="0070C0"/>
-              </a:solidFill>
-              <a:ea typeface="Calibri"/>
-              <a:cs typeface="Calibri"/>
-            </a:endParaRPr>
-          </a:p>
-          <a:p>
-            <a:pPr algn="ctr"/>
-            <a:endParaRPr lang="pt-PT"/>
-          </a:p>
-        </p:txBody>
-      </p:sp>
-      <p:sp>
-        <p:nvSpPr>
-          <p:cNvPr id="12" name="CaixaDeTexto 11">
-            <a:extLst>
-              <a:ext uri="{FF2B5EF4-FFF2-40B4-BE49-F238E27FC236}">
-                <a16:creationId xmlns:a16="http://schemas.microsoft.com/office/drawing/2014/main" id="{A97FA346-6478-D337-6A7C-73FDC0D79E86}"/>
-              </a:ext>
-            </a:extLst>
-          </p:cNvPr>
-          <p:cNvSpPr txBox="1"/>
-          <p:nvPr/>
-        </p:nvSpPr>
-        <p:spPr>
-          <a:xfrm>
-            <a:off x="3355099" y="1207047"/>
-            <a:ext cx="403992" cy="646331"/>
-          </a:xfrm>
-          <a:prstGeom prst="rect">
-            <a:avLst/>
-          </a:prstGeom>
-          <a:noFill/>
-        </p:spPr>
-        <p:txBody>
-          <a:bodyPr rot="0" spcFirstLastPara="0" vertOverflow="overflow" horzOverflow="overflow" vert="horz" wrap="square" lIns="91440" tIns="45720" rIns="91440" bIns="45720" numCol="1" spcCol="0" rtlCol="0" fromWordArt="0" anchor="t" anchorCtr="0" forceAA="0" compatLnSpc="1">
-            <a:prstTxWarp prst="textNoShape">
-              <a:avLst/>
-            </a:prstTxWarp>
-            <a:spAutoFit/>
-          </a:bodyPr>
-          <a:lstStyle/>
-          <a:p>
-            <a:r>
-              <a:rPr lang="en-US"/>
-              <a:t>🩺 </a:t>
-            </a:r>
-          </a:p>
-          <a:p>
-            <a:pPr algn="ctr"/>
-            <a:endParaRPr lang="pt-PT"/>
-          </a:p>
-        </p:txBody>
-      </p:sp>
-      <p:sp>
-        <p:nvSpPr>
-          <p:cNvPr id="13" name="CaixaDeTexto 12">
-            <a:extLst>
-              <a:ext uri="{FF2B5EF4-FFF2-40B4-BE49-F238E27FC236}">
-                <a16:creationId xmlns:a16="http://schemas.microsoft.com/office/drawing/2014/main" id="{9BF3F924-0132-0593-8F2C-576FED436A65}"/>
-              </a:ext>
-            </a:extLst>
-          </p:cNvPr>
-          <p:cNvSpPr txBox="1"/>
-          <p:nvPr/>
-        </p:nvSpPr>
-        <p:spPr>
-          <a:xfrm>
-            <a:off x="6340693" y="1182413"/>
-            <a:ext cx="423699" cy="374259"/>
-          </a:xfrm>
-          <a:prstGeom prst="rect">
-            <a:avLst/>
-          </a:prstGeom>
-          <a:noFill/>
-        </p:spPr>
-        <p:txBody>
-          <a:bodyPr rot="0" spcFirstLastPara="0" vertOverflow="overflow" horzOverflow="overflow" vert="horz" wrap="square" lIns="91440" tIns="45720" rIns="91440" bIns="45720" numCol="1" spcCol="0" rtlCol="0" fromWordArt="0" anchor="t" anchorCtr="0" forceAA="0" compatLnSpc="1">
-            <a:prstTxWarp prst="textNoShape">
-              <a:avLst/>
-            </a:prstTxWarp>
-            <a:spAutoFit/>
-          </a:bodyPr>
-          <a:lstStyle/>
-          <a:p>
-            <a:r>
-              <a:rPr lang="en-US"/>
-              <a:t>📆</a:t>
-            </a:r>
-          </a:p>
-        </p:txBody>
-      </p:sp>
-      <p:sp>
-        <p:nvSpPr>
-          <p:cNvPr id="14" name="CaixaDeTexto 13">
-            <a:extLst>
-              <a:ext uri="{FF2B5EF4-FFF2-40B4-BE49-F238E27FC236}">
-                <a16:creationId xmlns:a16="http://schemas.microsoft.com/office/drawing/2014/main" id="{54CAE699-A9CD-BB8C-D6BA-2BC175335BDD}"/>
-              </a:ext>
-            </a:extLst>
-          </p:cNvPr>
-          <p:cNvSpPr txBox="1"/>
-          <p:nvPr/>
-        </p:nvSpPr>
-        <p:spPr>
-          <a:xfrm>
-            <a:off x="344872" y="2995447"/>
-            <a:ext cx="394138" cy="374259"/>
-          </a:xfrm>
-          <a:prstGeom prst="rect">
-            <a:avLst/>
-          </a:prstGeom>
-          <a:noFill/>
-        </p:spPr>
-        <p:txBody>
-          <a:bodyPr rot="0" spcFirstLastPara="0" vertOverflow="overflow" horzOverflow="overflow" vert="horz" wrap="square" lIns="91440" tIns="45720" rIns="91440" bIns="45720" numCol="1" spcCol="0" rtlCol="0" fromWordArt="0" anchor="t" anchorCtr="0" forceAA="0" compatLnSpc="1">
-            <a:prstTxWarp prst="textNoShape">
-              <a:avLst/>
-            </a:prstTxWarp>
-            <a:spAutoFit/>
-          </a:bodyPr>
-          <a:lstStyle/>
-          <a:p>
-            <a:r>
-              <a:rPr lang="en-US"/>
-              <a:t>〰️ </a:t>
-            </a:r>
-          </a:p>
-        </p:txBody>
-      </p:sp>
-      <p:sp>
-        <p:nvSpPr>
-          <p:cNvPr id="15" name="CaixaDeTexto 14">
-            <a:extLst>
-              <a:ext uri="{FF2B5EF4-FFF2-40B4-BE49-F238E27FC236}">
-                <a16:creationId xmlns:a16="http://schemas.microsoft.com/office/drawing/2014/main" id="{CC30D142-8F6D-BE0F-8106-8B9CDAD97301}"/>
-              </a:ext>
-            </a:extLst>
-          </p:cNvPr>
-          <p:cNvSpPr txBox="1"/>
-          <p:nvPr/>
-        </p:nvSpPr>
-        <p:spPr>
-          <a:xfrm>
-            <a:off x="3404367" y="2980667"/>
-            <a:ext cx="394138" cy="374259"/>
-          </a:xfrm>
-          <a:prstGeom prst="rect">
-            <a:avLst/>
-          </a:prstGeom>
-          <a:noFill/>
-        </p:spPr>
-        <p:txBody>
-          <a:bodyPr rot="0" spcFirstLastPara="0" vertOverflow="overflow" horzOverflow="overflow" vert="horz" wrap="square" lIns="91440" tIns="45720" rIns="91440" bIns="45720" numCol="1" spcCol="0" rtlCol="0" fromWordArt="0" anchor="t" anchorCtr="0" forceAA="0" compatLnSpc="1">
-            <a:prstTxWarp prst="textNoShape">
-              <a:avLst/>
-            </a:prstTxWarp>
-            <a:spAutoFit/>
-          </a:bodyPr>
-          <a:lstStyle/>
-          <a:p>
-            <a:r>
-              <a:rPr lang="en-US"/>
-              <a:t>📊 </a:t>
-            </a:r>
-          </a:p>
-        </p:txBody>
-      </p:sp>
-      <p:sp>
-        <p:nvSpPr>
-          <p:cNvPr id="17" name="CaixaDeTexto 16">
-            <a:extLst>
-              <a:ext uri="{FF2B5EF4-FFF2-40B4-BE49-F238E27FC236}">
-                <a16:creationId xmlns:a16="http://schemas.microsoft.com/office/drawing/2014/main" id="{61BFAF01-BB3F-6698-D3DA-0F7CB94C33CE}"/>
-              </a:ext>
-            </a:extLst>
-          </p:cNvPr>
-          <p:cNvSpPr txBox="1"/>
-          <p:nvPr/>
-        </p:nvSpPr>
-        <p:spPr>
-          <a:xfrm>
-            <a:off x="6330841" y="2965887"/>
-            <a:ext cx="403992" cy="369332"/>
-          </a:xfrm>
-          <a:prstGeom prst="rect">
-            <a:avLst/>
-          </a:prstGeom>
-          <a:noFill/>
-        </p:spPr>
-        <p:txBody>
-          <a:bodyPr rot="0" spcFirstLastPara="0" vertOverflow="overflow" horzOverflow="overflow" vert="horz" wrap="square" lIns="91440" tIns="45720" rIns="91440" bIns="45720" numCol="1" spcCol="0" rtlCol="0" fromWordArt="0" anchor="t" anchorCtr="0" forceAA="0" compatLnSpc="1">
-            <a:prstTxWarp prst="textNoShape">
-              <a:avLst/>
-            </a:prstTxWarp>
-            <a:spAutoFit/>
-          </a:bodyPr>
-          <a:lstStyle/>
-          <a:p>
-            <a:r>
-              <a:rPr lang="en-US"/>
-              <a:t>⚠️ </a:t>
-            </a:r>
-          </a:p>
-        </p:txBody>
-      </p:sp>
-    </p:spTree>
-    <p:extLst>
-      <p:ext uri="{BB962C8B-B14F-4D97-AF65-F5344CB8AC3E}">
-        <p14:creationId xmlns:p14="http://schemas.microsoft.com/office/powerpoint/2010/main" val="2589345480"/>
-      </p:ext>
-    </p:extLst>
-  </p:cSld>
-  <p:clrMapOvr>
-    <a:masterClrMapping/>
-  </p:clrMapOvr>
-</p:sld>
-</file>
-
 <file path=ppt/slides/slide2.xml><?xml version="1.0" encoding="utf-8"?>
 <p:sld xmlns:a="http://schemas.openxmlformats.org/drawingml/2006/main" xmlns:r="http://schemas.openxmlformats.org/officeDocument/2006/relationships" xmlns:p="http://schemas.openxmlformats.org/presentationml/2006/main">
   <p:cSld name="Slide 2">
@@ -10686,7 +9445,7 @@
         </p:nvSpPr>
         <p:spPr>
           <a:xfrm>
-            <a:off x="365760" y="822960"/>
+            <a:off x="365760" y="759126"/>
             <a:ext cx="8321040" cy="1051560"/>
           </a:xfrm>
           <a:prstGeom prst="rect">
@@ -10725,7 +9484,7 @@
         </p:nvSpPr>
         <p:spPr>
           <a:xfrm>
-            <a:off x="502920" y="877824"/>
+            <a:off x="502920" y="819775"/>
             <a:ext cx="8046720" cy="914400"/>
           </a:xfrm>
           <a:prstGeom prst="rect">
@@ -10738,9 +9497,6 @@
           <a:bodyPr wrap="square" rtlCol="0" anchor="ctr"/>
           <a:lstStyle/>
           <a:p>
-            <a:pPr marL="0" indent="0">
-              <a:buNone/>
-            </a:pPr>
             <a:r>
               <a:rPr lang="en-US" sz="2000">
                 <a:solidFill>
@@ -10762,6 +9518,41 @@
                 <a:cs typeface="Calibri" pitchFamily="34" charset="-120"/>
               </a:rPr>
               <a:t>Are workers using Self-Declared Disease Notifications (ADD) strategically - to extend weekends and bridge holidays - rather than for genuine illness?</a:t>
+            </a:r>
+          </a:p>
+          <a:p>
+            <a:r>
+              <a:rPr lang="en-US" sz="2000">
+                <a:solidFill>
+                  <a:srgbClr val="FFFFFF"/>
+                </a:solidFill>
+                <a:latin typeface="Calibri" pitchFamily="34" charset="0"/>
+                <a:ea typeface="Calibri" pitchFamily="34" charset="-122"/>
+                <a:cs typeface="Calibri" pitchFamily="34" charset="-120"/>
+              </a:rPr>
+              <a:t>❓</a:t>
+            </a:r>
+            <a:r>
+              <a:rPr lang="en-US" sz="1600">
+                <a:solidFill>
+                  <a:srgbClr val="FFFFFF"/>
+                </a:solidFill>
+                <a:latin typeface="Calibri" pitchFamily="34" charset="0"/>
+                <a:ea typeface="Calibri" pitchFamily="34" charset="-122"/>
+                <a:cs typeface="Calibri" pitchFamily="34" charset="-120"/>
+              </a:rPr>
+              <a:t> If so, w</a:t>
+            </a:r>
+            <a:r>
+              <a:rPr lang="en-US" sz="1500">
+                <a:solidFill>
+                  <a:srgbClr val="FFFFFF"/>
+                </a:solidFill>
+                <a:latin typeface="Calibri" pitchFamily="34" charset="0"/>
+                <a:ea typeface="Calibri" pitchFamily="34" charset="-122"/>
+                <a:cs typeface="Calibri" pitchFamily="34" charset="-120"/>
+              </a:rPr>
+              <a:t>hat is the estimated economic impact of ADD convenience?</a:t>
             </a:r>
             <a:endParaRPr lang="en-US" sz="1500"/>
           </a:p>
@@ -12835,7 +11626,18 @@
               <p:nvPr/>
             </p:nvPicPr>
             <p:blipFill>
-              <a:blip r:embed="rId4"/>
+              <a:blip r:embed="rId4">
+                <a:clrChange>
+                  <a:clrFrom>
+                    <a:prstClr val="black"/>
+                  </a:clrFrom>
+                  <a:clrTo>
+                    <a:prstClr val="black">
+                      <a:alpha val="0"/>
+                    </a:prstClr>
+                  </a:clrTo>
+                </a:clrChange>
+              </a:blip>
               <a:stretch>
                 <a:fillRect/>
               </a:stretch>
@@ -20991,22 +19793,22 @@
     <we:reference id="WA200003233" version="2.0.0.3" store="WA200003233" storeType="OMEX"/>
   </we:alternateReferences>
   <we:properties>
-    <we:property name="reportUrl" value="&quot;/links/idtQHTEZUq?ctid=22c84608-f01d-46c5-8024-63cc962e5f51&amp;pbi_source=linkShare&quot;"/>
-    <we:property name="reportName" value="&quot;Dashboard&quot;"/>
-    <we:property name="reportState" value="&quot;CONNECTED&quot;"/>
-    <we:property name="embedUrl" value="&quot;/reportEmbed?reportId=be4cbf48-6e9d-4431-abf4-d5e0e5372239&amp;config=eyJjbHVzdGVyVXJsIjoiaHR0cHM6Ly9XQUJJLU5PUlRILUVVUk9QRS1yZWRpcmVjdC5hbmFseXNpcy53aW5kb3dzLm5ldCIsImVtYmVkRmVhdHVyZXMiOnsidXNhZ2VNZXRyaWNzVk5leHQiOnRydWV9fQ%3D%3D&amp;disableSensitivityBanner=true&amp;storytellingChangeViewModeShortcutKeys=true&quot;"/>
-    <we:property name="pageDisplayName" value="&quot;Página 1&quot;"/>
-    <we:property name="datasetId" value="&quot;cb8db9b8-f82a-4ead-9da0-94686a9e3964&quot;"/>
+    <we:property name="artifactViewState" value="&quot;live&quot;"/>
     <we:property name="backgroundColor" value="&quot;#3A3A3A&quot;"/>
     <we:property name="bookmark" value="&quot;H4sIAAAAAAAAA+1a227bRhD9FYN5cAvIxfJO+s2xHDSokxqx4T4UhjHcHUqbUqSyXDl2An1NHwr0N/JjnV1SjixTlm+NAseCAIl7mZ3LmcuO9NkRsh4XcPEWRuhsO29AcRCV2nCdnlM2Y0nGkcVuzlmQIhN5goFHs9VYy6qsne3PjgY1QH0s6wkUhhAN/ulgHoHPojRgDJJQAIvD1DnpOVAUBzAwa3Ioauw5Y1R1VUIhP2FDgqa0muC05+D5uKgUmIMONWg0h53RcnomxtxffOIDuJZneIhcN6MMswh5zmNIkwATkYnQLKubBZbfziU0nstCE3XzNbvYOx8rkuPzTA1RzMM0TfzIY8jDiLHQqkFfjM3sLnE3qJTkUNBgQ8jQOZ5x6/WcV6oaWYqtsgWt3Cu11Bfm4ZS2YilAyYrGjyxZNiWF/TFEhXbfblUK2YhJRCptPgybWNft4Ovy6ljd7ismo/L66sNqoji+w/zrg2VrSqo/UBUZxrLWBw00RqwcQzGx1iWi+5JEJGmNkGaYFpaTojALT6bmddIYcO68W/HRrZFulnrOsPq4q5CUL5xt1x55ZjFEqtIgy9aamCd55LvI0PWCDKM49bPlBm9NuiPOoORorHRVjJ3BQOEAZobYe4CML4jPelJoqE8HStKxC3J2Tb+alC3W2aIG2LT3bdnf6fcXWf6gxSkI8Sis/ioJYooPL/bxDIvrXF3OX5+acXRM8GkCSIvve4Kv9VlL7ss/X/42TtoFyDmW2u8fJhI2BG6YJbVd00rj7JTVNRDP6+VqUPmhVHOkJOURrfBZQd0KevPl3/pG3fyoTtWX1zMDs5mhluWgaGsMW0nYb02mdWoN/C8UO7RldwhKmwone09Fg8kO01mZQcy9nyskWvxd2LTxxPXaBqsnL+d85DGFTM+Jg5hFPsRRGIJwfQzDJFhZPdwUmh6eZA/x/ObU8d1n/5UOOZbY6YiVEqheNi7Xl2pW91N9vfddCGrq5NXB4tEg0EAUk8zjvhfTXYsLL0zjCOM1Q3SgJuPqFPWls94dqkrq4Qi15OZpH3O9XgC/k4OhZeGQ03KxdwYd0W997FmuyL4n5uF32gC6Inv79/A9Xkxqwg2Kl6Du4oTuohM+Ooy+lXctHNt6Gfci18UoYwHEnLFYZGK5l836BixxOaQQZLQtDHwes/BhfYNivm+wX9FWymJ4BFmBp3Em0M+TdCtK3WArSHi6lbh5tJWlURIyP8gx9dfbXigWVd0UFg/vLjzxuqTzsthzOPAhiv7XLl5jE2mBWZuQ8Fo0njgaEzv1zC9nT7/JsiE0i6938537wK/T/nPhdbntrRde7Vj+dAyfZPWzYwDxfC98vjjf9+K8+oJYSE6xeT4ROiNUAyudMJwYvxs33Em083SpVLrfNq7RJoZOeNN2KnNGuOkxz99iLr2PGNu2702nyT2luDMh1+sgNKrEKiqbfZJCVB/LTaeNtcsuwJch+8nDps1SVoXMdwWEIYcwEyl3A4rB3pqrbS2pXCHqAxw98XuhqMqJfr4Z3hoLDWQzNw895CJKE8aSNPMDse4L4pIexnMgfmAgfuTWAhdhzgB44iY+JEngB0G4ZuSsaC08I2jtCOq8Pvup62Usi03/FFIuCEupVe2NthoCfV6J9FaHXf8uWIXKpcnvDUI9UbcuOF4cVONTWiUFlnr5b7YbY/NHCsbYxhCye5fjdzMGXcOwgHc4kBXWi5yZYVMNfRtWbvr9vvuXz5WOW8jyTk3hB/ajVkvwf6T01ae27uQnWe75AU+Q+X6UZe4t3Enjuc6q80WHsgS7omE10fUYOB5AiR1RkfABpUCxIgrZf/pcBqDp9D+nFxbldyQAAA==&quot;"/>
+    <we:property name="creatorSessionId" value="&quot;63b0345e-aaee-4d4c-b6df-e73f6aaf732f&quot;"/>
+    <we:property name="creatorTenantId" value="&quot;22c84608-f01d-46c5-8024-63cc962e5f51&quot;"/>
+    <we:property name="creatorUserId" value="&quot;1003200352AD4D56&quot;"/>
+    <we:property name="datasetId" value="&quot;cb8db9b8-f82a-4ead-9da0-94686a9e3964&quot;"/>
+    <we:property name="embedUrl" value="&quot;/reportEmbed?reportId=be4cbf48-6e9d-4431-abf4-d5e0e5372239&amp;config=eyJjbHVzdGVyVXJsIjoiaHR0cHM6Ly9XQUJJLU5PUlRILUVVUk9QRS1yZWRpcmVjdC5hbmFseXNpcy53aW5kb3dzLm5ldCIsImVtYmVkRmVhdHVyZXMiOnsidXNhZ2VNZXRyaWNzVk5leHQiOnRydWV9fQ%3D%3D&amp;disableSensitivityBanner=true&amp;storytellingChangeViewModeShortcutKeys=true&quot;"/>
     <we:property name="initialStateBookmark" value="&quot;H4sIAAAAAAAAA+1a227bOBD9lUB9yC7gLKi7lDc3TrFFkzZIguzDoghG5MhmV5ZcikqTFv6afVhgf6M/tkNJTh1HjnPbukhjGLBJkcO5nLlw7C+WkOUkg4u3MEZr29oHxUEUasO2elbezL189+7Nfv/wzenb/v4uTRcTLYu8tLa/WBrUEPWJLCvIDAWa/PN9z4IsO4ChGaWQldizJqjKIodMfsZmMT3SqsJpz8LzSVYoMCSPNGg0ZM9oOY3pbPs3l04EruUZHiHXzSzDJECe8hDiyMNIJMI3y8pmQc1Z5xKaT2Wmibr5mlzsnk8UcfxlJmkQcj+OIzdwGHI/YMz3HKKrLybm6Q5xNyyU5JDRZEPI0DmZcev0rFeqGNcUW30KWrmba6kvzOCUtmIuQMmC5o9rsmxKCvtjhArrfTtFLmQjJhEptPkwbGJZtpOv86tzZbsvq8b59dVHRaU4HmL6bVCzNSXVH6iCDFOzNgANNEesnEBW1XYkonuSRCRpjZBmmhbmVZaZhe+n5vW+MeDcebfio1sj3Sz1rFHxaUchKV9Y23Z95FmNIVKVBpm31sQ0SgPXRoa24yUYhLGbLDd4a9K+OIOco7HSVTH6w6HCIcwMsfsAGV8Qn2WVaShPh0rSsQtydj1+VeUt1tmiBti0933Z7w8Giyx/1OIUhHgUVn+XBDHFRxd7eIbZda4un19/NOPohODTBJAW3/cEX+uzNbmv/3z92zhpFyDnWGq/f6wkbAjcMEvKek0rjdXPi2sgntfL1aDyU6nmWEnKGFrhs4K6FbT/9d/yRt38rE41kNczA6szQynzYdbWGHUlUX9rMq1VauB/oejTlp0RKG1qmeQDFQ0mO0xnZQYx92GukGjxd1GnjSeu1zZYPXk55yOPKWR6VuiFLHAhDHwfhO2i70feyurhptD08CR7hOc3p44fPvuvdMiJxE5HLJRA9bJxuYFUs7qf6uvdH0JQUyevDhaPBoEGohglDnedkDHgwvHjMMBwzRAdqmpSnKK+dNa7Q1VJPRqjltyM9jDV6wXwoRyOahaOOC0Xu2fQEf3Wx17Nlbljm8E72gC6IHu79/A9nlUl4QbFS1B3cUJ70QkfHUbfy7sWjm29jDuBbWOQMA9CzlgoErHcy2Z9AxbZHGLwEtrmey4Pmf+wvkE23zfYK2grZTE8hiTD0zAR6KZRvBXEtrflRTzeiuw02EriIPKZ66UYu+ttL2SLqm4Ki4d3F554XdJ5WexZHPgIxeBbo66xiayBWZqQ8Fo0njieEDvlzC9nozcybwjN4uvdfOc+8Ou0/1x4XW772guvNiV/OYHPsvjVMoB4vhc+X5zve3FefUHMJKfYPJ8IrTGqYS2dMJwYv5s03Emsn9OlUulB27jGOjF0wpu2U5kzxk2HOe4Ws+l9zNh2/d60mtyTizsTsp0OQuNCrKKyOSApRPEp37TaWLvsAnwZsp88bNosVauQubYA3+fgJyLmtkcx2Flzta0llStEfYjjJ34vFEVe6eeb4a2x0EA2sVPfQS6COGIsihPXE+u+IC7pYTwH4gcG4kduLXDhpwyAR3bkQhR5ruf5a0bOitbCM4LWjqDO67Mb207CktD0TyHmgrAU16q90VYjoM8rkb7WYRqAy4LYYwwiXwAL/XglKpcmv32EslK3LjheHBSTU1olBeZ6+W+2GxPzXwnG2MYIknuX43czBl3DMINDHMoCy0XOzLSphr4PKzf9ft/9y+dKx81kfqem8AP7Uasl+D9S+upTW3dyoyR1XI9HyFw3SBL7Fu6k8VwnxfmiQ9UEu6JhUelyAhwPIMeOqEj4gFygWBGF6n/6NDGLuJFJtipsmf//XAas6fQ/FwfLvIokAAA=&quot;"/>
     <we:property name="isFiltersActionButtonVisible" value="true"/>
     <we:property name="isVisualContainerHeaderHidden" value="false"/>
+    <we:property name="pageDisplayName" value="&quot;Página 1&quot;"/>
     <we:property name="reportEmbeddedTime" value="&quot;2026-05-11T15:43:21.342Z&quot;"/>
-    <we:property name="creatorTenantId" value="&quot;22c84608-f01d-46c5-8024-63cc962e5f51&quot;"/>
-    <we:property name="creatorUserId" value="&quot;1003200352AD4D56&quot;"/>
-    <we:property name="creatorSessionId" value="&quot;63b0345e-aaee-4d4c-b6df-e73f6aaf732f&quot;"/>
-    <we:property name="artifactViewState" value="&quot;live&quot;"/>
+    <we:property name="reportName" value="&quot;Dashboard&quot;"/>
+    <we:property name="reportState" value="&quot;CONNECTED&quot;"/>
+    <we:property name="reportUrl" value="&quot;/links/idtQHTEZUq?ctid=22c84608-f01d-46c5-8024-63cc962e5f51&amp;pbi_source=linkShare&quot;"/>
   </we:properties>
   <we:bindings/>
   <we:snapshot xmlns:r="http://schemas.openxmlformats.org/officeDocument/2006/relationships"/>
